--- a/reports/presentation-slides/Jerel_Velarde_Technical_Presentation.pptx
+++ b/reports/presentation-slides/Jerel_Velarde_Technical_Presentation.pptx
@@ -2236,7 +2236,7 @@
                   <a:srgbClr val="CBD5E1"/>
                 </a:solidFill>
               </a:rPr>
-              <a:t>XGBoost (R²=0.41, MAE=$29,850) outperformed Linear Regression and Random Forest</a:t>
+              <a:t>Linear Regression (R²=0.41, MAE=$33,731) achieved the best test performance</a:t>
             </a:r>
             <a:endParaRPr lang="en-US" sz="1300" dirty="0"/>
           </a:p>
@@ -6686,9 +6686,9 @@
                         <a:buNone/>
                       </a:pPr>
                       <a:r>
-                        <a:rPr lang="en-US" sz="1300" dirty="0">
+                        <a:rPr lang="en-US" sz="1300" b="1" dirty="0">
                           <a:solidFill>
-                            <a:srgbClr val="334155"/>
+                            <a:srgbClr val="065F46"/>
                           </a:solidFill>
                         </a:rPr>
                         <a:t>Linear Regression</a:t>
@@ -6734,7 +6734,7 @@
                       <a:tailEnd type="none" w="med" len="med"/>
                     </a:lnB>
                     <a:solidFill>
-                      <a:srgbClr val="FFFFFF"/>
+                      <a:srgbClr val="ECFDF5"/>
                     </a:solidFill>
                   </a:tcPr>
                 </a:tc>
@@ -6747,12 +6747,12 @@
                         <a:buNone/>
                       </a:pPr>
                       <a:r>
-                        <a:rPr lang="en-US" sz="1300" dirty="0">
+                        <a:rPr lang="en-US" sz="1300" b="1" dirty="0">
                           <a:solidFill>
-                            <a:srgbClr val="334155"/>
+                            <a:srgbClr val="065F46"/>
                           </a:solidFill>
                         </a:rPr>
-                        <a:t>$48,226</a:t>
+                        <a:t>$53,248</a:t>
                       </a:r>
                       <a:endParaRPr lang="en-US" sz="1300" dirty="0"/>
                     </a:p>
@@ -6795,7 +6795,7 @@
                       <a:tailEnd type="none" w="med" len="med"/>
                     </a:lnB>
                     <a:solidFill>
-                      <a:srgbClr val="FFFFFF"/>
+                      <a:srgbClr val="ECFDF5"/>
                     </a:solidFill>
                   </a:tcPr>
                 </a:tc>
@@ -6808,12 +6808,12 @@
                         <a:buNone/>
                       </a:pPr>
                       <a:r>
-                        <a:rPr lang="en-US" sz="1300" dirty="0">
+                        <a:rPr lang="en-US" sz="1300" b="1" dirty="0">
                           <a:solidFill>
-                            <a:srgbClr val="334155"/>
+                            <a:srgbClr val="065F46"/>
                           </a:solidFill>
                         </a:rPr>
-                        <a:t>$35,003</a:t>
+                        <a:t>$33,731</a:t>
                       </a:r>
                       <a:endParaRPr lang="en-US" sz="1300" dirty="0"/>
                     </a:p>
@@ -6856,7 +6856,7 @@
                       <a:tailEnd type="none" w="med" len="med"/>
                     </a:lnB>
                     <a:solidFill>
-                      <a:srgbClr val="FFFFFF"/>
+                      <a:srgbClr val="ECFDF5"/>
                     </a:solidFill>
                   </a:tcPr>
                 </a:tc>
@@ -6869,12 +6869,12 @@
                         <a:buNone/>
                       </a:pPr>
                       <a:r>
-                        <a:rPr lang="en-US" sz="1300" dirty="0">
+                        <a:rPr lang="en-US" sz="1300" b="1" dirty="0">
                           <a:solidFill>
-                            <a:srgbClr val="334155"/>
+                            <a:srgbClr val="065F46"/>
                           </a:solidFill>
                         </a:rPr>
-                        <a:t>0.28</a:t>
+                        <a:t>0.41</a:t>
                       </a:r>
                       <a:endParaRPr lang="en-US" sz="1300" dirty="0"/>
                     </a:p>
@@ -6917,7 +6917,7 @@
                       <a:tailEnd type="none" w="med" len="med"/>
                     </a:lnB>
                     <a:solidFill>
-                      <a:srgbClr val="FFFFFF"/>
+                      <a:srgbClr val="ECFDF5"/>
                     </a:solidFill>
                   </a:tcPr>
                 </a:tc>
@@ -7003,7 +7003,7 @@
                             <a:srgbClr val="334155"/>
                           </a:solidFill>
                         </a:rPr>
-                        <a:t>$44,698</a:t>
+                        <a:t>$53,436</a:t>
                       </a:r>
                       <a:endParaRPr lang="en-US" sz="1300" dirty="0"/>
                     </a:p>
@@ -7064,7 +7064,7 @@
                             <a:srgbClr val="334155"/>
                           </a:solidFill>
                         </a:rPr>
-                        <a:t>$30,515</a:t>
+                        <a:t>$32,189</a:t>
                       </a:r>
                       <a:endParaRPr lang="en-US" sz="1300" dirty="0"/>
                     </a:p>
@@ -7125,7 +7125,7 @@
                             <a:srgbClr val="334155"/>
                           </a:solidFill>
                         </a:rPr>
-                        <a:t>0.38</a:t>
+                        <a:t>0.41</a:t>
                       </a:r>
                       <a:endParaRPr lang="en-US" sz="1300" dirty="0"/>
                     </a:p>
@@ -7188,9 +7188,9 @@
                         <a:buNone/>
                       </a:pPr>
                       <a:r>
-                        <a:rPr lang="en-US" sz="1300" b="1" dirty="0">
+                        <a:rPr lang="en-US" sz="1300" dirty="0">
                           <a:solidFill>
-                            <a:srgbClr val="065F46"/>
+                            <a:srgbClr val="334155"/>
                           </a:solidFill>
                         </a:rPr>
                         <a:t>XGBoost</a:t>
@@ -7236,7 +7236,7 @@
                       <a:tailEnd type="none" w="med" len="med"/>
                     </a:lnB>
                     <a:solidFill>
-                      <a:srgbClr val="ECFDF5"/>
+                      <a:srgbClr val="FFFFFF"/>
                     </a:solidFill>
                   </a:tcPr>
                 </a:tc>
@@ -7249,12 +7249,12 @@
                         <a:buNone/>
                       </a:pPr>
                       <a:r>
-                        <a:rPr lang="en-US" sz="1300" b="1" dirty="0">
+                        <a:rPr lang="en-US" sz="1300" dirty="0">
                           <a:solidFill>
-                            <a:srgbClr val="065F46"/>
+                            <a:srgbClr val="334155"/>
                           </a:solidFill>
                         </a:rPr>
-                        <a:t>$43,607</a:t>
+                        <a:t>$53,813</a:t>
                       </a:r>
                       <a:endParaRPr lang="en-US" sz="1300" dirty="0"/>
                     </a:p>
@@ -7297,7 +7297,7 @@
                       <a:tailEnd type="none" w="med" len="med"/>
                     </a:lnB>
                     <a:solidFill>
-                      <a:srgbClr val="ECFDF5"/>
+                      <a:srgbClr val="FFFFFF"/>
                     </a:solidFill>
                   </a:tcPr>
                 </a:tc>
@@ -7310,12 +7310,12 @@
                         <a:buNone/>
                       </a:pPr>
                       <a:r>
-                        <a:rPr lang="en-US" sz="1300" b="1" dirty="0">
+                        <a:rPr lang="en-US" sz="1300" dirty="0">
                           <a:solidFill>
-                            <a:srgbClr val="065F46"/>
+                            <a:srgbClr val="334155"/>
                           </a:solidFill>
                         </a:rPr>
-                        <a:t>$29,850</a:t>
+                        <a:t>$32,574</a:t>
                       </a:r>
                       <a:endParaRPr lang="en-US" sz="1300" dirty="0"/>
                     </a:p>
@@ -7358,7 +7358,7 @@
                       <a:tailEnd type="none" w="med" len="med"/>
                     </a:lnB>
                     <a:solidFill>
-                      <a:srgbClr val="ECFDF5"/>
+                      <a:srgbClr val="FFFFFF"/>
                     </a:solidFill>
                   </a:tcPr>
                 </a:tc>
@@ -7371,12 +7371,12 @@
                         <a:buNone/>
                       </a:pPr>
                       <a:r>
-                        <a:rPr lang="en-US" sz="1300" b="1" dirty="0">
+                        <a:rPr lang="en-US" sz="1300" dirty="0">
                           <a:solidFill>
-                            <a:srgbClr val="065F46"/>
+                            <a:srgbClr val="334155"/>
                           </a:solidFill>
                         </a:rPr>
-                        <a:t>0.41</a:t>
+                        <a:t>0.40</a:t>
                       </a:r>
                       <a:endParaRPr lang="en-US" sz="1300" dirty="0"/>
                     </a:p>
@@ -7419,7 +7419,7 @@
                       <a:tailEnd type="none" w="med" len="med"/>
                     </a:lnB>
                     <a:solidFill>
-                      <a:srgbClr val="ECFDF5"/>
+                      <a:srgbClr val="FFFFFF"/>
                     </a:solidFill>
                   </a:tcPr>
                 </a:tc>
@@ -7487,7 +7487,7 @@
                   <a:srgbClr val="64748B"/>
                 </a:solidFill>
               </a:rPr>
-              <a:t>XGBoost achieves the best performance with R² = 0.41 — modest but realistic for 565 rows with limited features</a:t>
+              <a:t>Linear Regression achieves the best test R² = 0.41 — modest but realistic for 565 rows with limited features</a:t>
             </a:r>
             <a:endParaRPr lang="en-US" sz="1000" dirty="0"/>
           </a:p>
